--- a/Capstone_project/Capstone_Project_Md_hasanuzzaman.pptx
+++ b/Capstone_project/Capstone_Project_Md_hasanuzzaman.pptx
@@ -5193,10 +5193,7 @@
               <a:buFont typeface="Arial"/>
               <a:buNone/>
             </a:pPr>
-            <a:r>
-              <a:rPr lang="en-US" sz="2200" dirty="0"/>
-              <a:t>&lt;Please present your dashboard in the following slides.&gt;</a:t>
-            </a:r>
+            <a:endParaRPr lang="en-US" sz="2200" dirty="0"/>
           </a:p>
         </p:txBody>
       </p:sp>
@@ -5304,54 +5301,37 @@
           </a:p>
         </p:txBody>
       </p:sp>
-      <p:sp>
-        <p:nvSpPr>
-          <p:cNvPr id="3" name="Content Placeholder 2">
+      <p:pic>
+        <p:nvPicPr>
+          <p:cNvPr id="4" name="Picture 3">
             <a:extLst>
               <a:ext uri="{FF2B5EF4-FFF2-40B4-BE49-F238E27FC236}">
-                <a16:creationId xmlns:a16="http://schemas.microsoft.com/office/drawing/2014/main" id="{B396FB03-F857-3EC0-249E-AE03F391502E}"/>
+                <a16:creationId xmlns:a16="http://schemas.microsoft.com/office/drawing/2014/main" id="{5A396169-0B8D-6F87-8F14-E5016F589B6E}"/>
               </a:ext>
             </a:extLst>
           </p:cNvPr>
-          <p:cNvSpPr>
-            <a:spLocks noGrp="1"/>
-          </p:cNvSpPr>
-          <p:nvPr>
-            <p:ph idx="1"/>
-          </p:nvPr>
-        </p:nvSpPr>
+          <p:cNvPicPr>
+            <a:picLocks noChangeAspect="1"/>
+          </p:cNvPicPr>
+          <p:nvPr/>
+        </p:nvPicPr>
+        <p:blipFill>
+          <a:blip r:embed="rId3"/>
+          <a:stretch>
+            <a:fillRect/>
+          </a:stretch>
+        </p:blipFill>
         <p:spPr>
           <a:xfrm>
-            <a:off x="838200" y="1690688"/>
-            <a:ext cx="10515600" cy="4351338"/>
-          </a:xfrm>
+            <a:off x="1823356" y="1391919"/>
+            <a:ext cx="8560164" cy="4772292"/>
+          </a:xfrm>
+          <a:prstGeom prst="rect">
+            <a:avLst/>
+          </a:prstGeom>
+          <a:noFill/>
         </p:spPr>
-        <p:txBody>
-          <a:bodyPr/>
-          <a:lstStyle/>
-          <a:p>
-            <a:pPr marL="0" indent="0">
-              <a:buNone/>
-            </a:pPr>
-            <a:endParaRPr lang="en-US" dirty="0"/>
-          </a:p>
-          <a:p>
-            <a:pPr marL="0" indent="0">
-              <a:buNone/>
-            </a:pPr>
-            <a:endParaRPr lang="en-US" dirty="0"/>
-          </a:p>
-          <a:p>
-            <a:pPr marL="0" indent="0">
-              <a:buNone/>
-            </a:pPr>
-            <a:r>
-              <a:rPr lang="en-US" dirty="0"/>
-              <a:t>Screenshot of dashboard tab 1 goes here</a:t>
-            </a:r>
-          </a:p>
-        </p:txBody>
-      </p:sp>
+      </p:pic>
     </p:spTree>
     <p:custDataLst>
       <p:tags r:id="rId1"/>
@@ -5426,54 +5406,36 @@
           </a:p>
         </p:txBody>
       </p:sp>
-      <p:sp>
-        <p:nvSpPr>
-          <p:cNvPr id="3" name="Content Placeholder 2">
+      <p:pic>
+        <p:nvPicPr>
+          <p:cNvPr id="4" name="Picture 3">
             <a:extLst>
               <a:ext uri="{FF2B5EF4-FFF2-40B4-BE49-F238E27FC236}">
-                <a16:creationId xmlns:a16="http://schemas.microsoft.com/office/drawing/2014/main" id="{73960BF9-AB8D-4916-3BC9-E2E92E0872BE}"/>
+                <a16:creationId xmlns:a16="http://schemas.microsoft.com/office/drawing/2014/main" id="{0EEA4AC4-6EE3-70FC-50FF-A9626223915F}"/>
               </a:ext>
             </a:extLst>
           </p:cNvPr>
-          <p:cNvSpPr>
-            <a:spLocks noGrp="1"/>
-          </p:cNvSpPr>
-          <p:nvPr>
-            <p:ph idx="1"/>
-          </p:nvPr>
-        </p:nvSpPr>
+          <p:cNvPicPr>
+            <a:picLocks noChangeAspect="1"/>
+          </p:cNvPicPr>
+          <p:nvPr/>
+        </p:nvPicPr>
+        <p:blipFill>
+          <a:blip r:embed="rId3"/>
+          <a:stretch>
+            <a:fillRect/>
+          </a:stretch>
+        </p:blipFill>
         <p:spPr>
           <a:xfrm>
-            <a:off x="838200" y="1690688"/>
-            <a:ext cx="10515600" cy="4351338"/>
-          </a:xfrm>
+            <a:off x="1401782" y="1407442"/>
+            <a:ext cx="9103658" cy="5012527"/>
+          </a:xfrm>
+          <a:prstGeom prst="rect">
+            <a:avLst/>
+          </a:prstGeom>
         </p:spPr>
-        <p:txBody>
-          <a:bodyPr/>
-          <a:lstStyle/>
-          <a:p>
-            <a:pPr marL="0" indent="0">
-              <a:buNone/>
-            </a:pPr>
-            <a:endParaRPr lang="en-US" dirty="0"/>
-          </a:p>
-          <a:p>
-            <a:pPr marL="0" indent="0">
-              <a:buNone/>
-            </a:pPr>
-            <a:endParaRPr lang="en-US" dirty="0"/>
-          </a:p>
-          <a:p>
-            <a:pPr marL="0" indent="0">
-              <a:buNone/>
-            </a:pPr>
-            <a:r>
-              <a:rPr lang="en-US" dirty="0"/>
-              <a:t>Screenshot of dashboard tab 2 goes here</a:t>
-            </a:r>
-          </a:p>
-        </p:txBody>
-      </p:sp>
+      </p:pic>
     </p:spTree>
     <p:custDataLst>
       <p:tags r:id="rId1"/>
@@ -9603,6 +9565,66 @@
           </a:p>
         </p:txBody>
       </p:sp>
+      <p:pic>
+        <p:nvPicPr>
+          <p:cNvPr id="2" name="Picture 1">
+            <a:extLst>
+              <a:ext uri="{FF2B5EF4-FFF2-40B4-BE49-F238E27FC236}">
+                <a16:creationId xmlns:a16="http://schemas.microsoft.com/office/drawing/2014/main" id="{D909ABF0-9268-057A-8BB2-03A6B4B8DB5A}"/>
+              </a:ext>
+            </a:extLst>
+          </p:cNvPr>
+          <p:cNvPicPr>
+            <a:picLocks noChangeAspect="1"/>
+          </p:cNvPicPr>
+          <p:nvPr/>
+        </p:nvPicPr>
+        <p:blipFill>
+          <a:blip r:embed="rId3"/>
+          <a:stretch>
+            <a:fillRect/>
+          </a:stretch>
+        </p:blipFill>
+        <p:spPr>
+          <a:xfrm>
+            <a:off x="302393" y="2321858"/>
+            <a:ext cx="5707204" cy="3694663"/>
+          </a:xfrm>
+          <a:prstGeom prst="rect">
+            <a:avLst/>
+          </a:prstGeom>
+        </p:spPr>
+      </p:pic>
+      <p:pic>
+        <p:nvPicPr>
+          <p:cNvPr id="3" name="Picture 2">
+            <a:extLst>
+              <a:ext uri="{FF2B5EF4-FFF2-40B4-BE49-F238E27FC236}">
+                <a16:creationId xmlns:a16="http://schemas.microsoft.com/office/drawing/2014/main" id="{1FAE7231-71E0-B991-FCDF-953612B8B6E2}"/>
+              </a:ext>
+            </a:extLst>
+          </p:cNvPr>
+          <p:cNvPicPr>
+            <a:picLocks noChangeAspect="1"/>
+          </p:cNvPicPr>
+          <p:nvPr/>
+        </p:nvPicPr>
+        <p:blipFill>
+          <a:blip r:embed="rId4"/>
+          <a:stretch>
+            <a:fillRect/>
+          </a:stretch>
+        </p:blipFill>
+        <p:spPr>
+          <a:xfrm>
+            <a:off x="5941844" y="2287132"/>
+            <a:ext cx="5837780" cy="3576563"/>
+          </a:xfrm>
+          <a:prstGeom prst="rect">
+            <a:avLst/>
+          </a:prstGeom>
+        </p:spPr>
+      </p:pic>
     </p:spTree>
     <p:custDataLst>
       <p:tags r:id="rId1"/>
@@ -9719,20 +9741,20 @@
           </a:p>
           <a:p>
             <a:r>
+              <a:rPr lang="en-GB" dirty="0"/>
+              <a:t>JavaScript continues to dominate as the top language.</a:t>
+            </a:r>
+          </a:p>
+          <a:p>
+            <a:r>
               <a:rPr lang="en-US" dirty="0"/>
-              <a:t>Finding 1</a:t>
+              <a:t>Python is the fastest-growing language.</a:t>
             </a:r>
           </a:p>
           <a:p>
             <a:r>
               <a:rPr lang="en-US" dirty="0"/>
-              <a:t>Finding 2</a:t>
-            </a:r>
-          </a:p>
-          <a:p>
-            <a:r>
-              <a:rPr lang="en-US" dirty="0"/>
-              <a:t>Finding 3</a:t>
+              <a:t>Swift remains a high-paying language</a:t>
             </a:r>
           </a:p>
         </p:txBody>
@@ -9780,20 +9802,21 @@
           <a:p>
             <a:r>
               <a:rPr lang="en-US" dirty="0"/>
-              <a:t>Implication 1</a:t>
-            </a:r>
-          </a:p>
-          <a:p>
-            <a:r>
-              <a:rPr lang="en-US" dirty="0"/>
-              <a:t>Implication 2</a:t>
-            </a:r>
-          </a:p>
-          <a:p>
-            <a:r>
-              <a:rPr lang="en-US" dirty="0"/>
-              <a:t>Implication 3</a:t>
-            </a:r>
+              <a:t>JavaScript's popularity paves the way for developers to switch to TypeScript.</a:t>
+            </a:r>
+          </a:p>
+          <a:p>
+            <a:r>
+              <a:rPr lang="en-GB" dirty="0"/>
+              <a:t>Increased demand for Python developers</a:t>
+            </a:r>
+          </a:p>
+          <a:p>
+            <a:r>
+              <a:rPr lang="en-GB" dirty="0"/>
+              <a:t>Companies may prioritize hiring Swift developers</a:t>
+            </a:r>
+            <a:endParaRPr lang="en-US" dirty="0"/>
           </a:p>
         </p:txBody>
       </p:sp>
@@ -10353,6 +10376,36 @@
           </a:p>
         </p:txBody>
       </p:sp>
+      <p:pic>
+        <p:nvPicPr>
+          <p:cNvPr id="7" name="Picture 6">
+            <a:extLst>
+              <a:ext uri="{FF2B5EF4-FFF2-40B4-BE49-F238E27FC236}">
+                <a16:creationId xmlns:a16="http://schemas.microsoft.com/office/drawing/2014/main" id="{040568C5-3B89-E003-079E-B161ACBE50B1}"/>
+              </a:ext>
+            </a:extLst>
+          </p:cNvPr>
+          <p:cNvPicPr>
+            <a:picLocks noChangeAspect="1"/>
+          </p:cNvPicPr>
+          <p:nvPr/>
+        </p:nvPicPr>
+        <p:blipFill>
+          <a:blip r:embed="rId3"/>
+          <a:stretch>
+            <a:fillRect/>
+          </a:stretch>
+        </p:blipFill>
+        <p:spPr>
+          <a:xfrm>
+            <a:off x="-13782" y="2415870"/>
+            <a:ext cx="11977181" cy="3698059"/>
+          </a:xfrm>
+          <a:prstGeom prst="rect">
+            <a:avLst/>
+          </a:prstGeom>
+        </p:spPr>
+      </p:pic>
     </p:spTree>
     <p:custDataLst>
       <p:tags r:id="rId1"/>
@@ -10467,21 +10520,22 @@
           </a:p>
           <a:p>
             <a:r>
-              <a:rPr lang="en-US" dirty="0"/>
-              <a:t>Finding 1</a:t>
-            </a:r>
-          </a:p>
-          <a:p>
-            <a:r>
-              <a:rPr lang="en-US" dirty="0"/>
-              <a:t>Finding 2</a:t>
-            </a:r>
-          </a:p>
-          <a:p>
-            <a:r>
-              <a:rPr lang="en-US" dirty="0"/>
-              <a:t>Finding 3</a:t>
-            </a:r>
+              <a:rPr lang="en-GB" dirty="0"/>
+              <a:t>MySQL is the most popular database.</a:t>
+            </a:r>
+          </a:p>
+          <a:p>
+            <a:r>
+              <a:rPr lang="en-GB" dirty="0"/>
+              <a:t>Decreased interest in Microsoft SQL Server.</a:t>
+            </a:r>
+          </a:p>
+          <a:p>
+            <a:r>
+              <a:rPr lang="en-GB" dirty="0"/>
+              <a:t>Increasing interest in PostgreSQL and MongoDB.</a:t>
+            </a:r>
+            <a:endParaRPr lang="en-US" dirty="0"/>
           </a:p>
         </p:txBody>
       </p:sp>
@@ -10527,21 +10581,22 @@
           </a:p>
           <a:p>
             <a:r>
-              <a:rPr lang="en-US" dirty="0"/>
-              <a:t>Implication 1</a:t>
-            </a:r>
-          </a:p>
-          <a:p>
-            <a:r>
-              <a:rPr lang="en-US" dirty="0"/>
-              <a:t>Implication 2</a:t>
-            </a:r>
-          </a:p>
-          <a:p>
-            <a:r>
-              <a:rPr lang="en-US" dirty="0"/>
-              <a:t>Implication 3</a:t>
-            </a:r>
+              <a:rPr lang="en-GB" dirty="0"/>
+              <a:t>MySQL continues to dominate the database market.</a:t>
+            </a:r>
+          </a:p>
+          <a:p>
+            <a:r>
+              <a:rPr lang="en-GB" dirty="0"/>
+              <a:t>Microsoft SQL Server may face market challenges.</a:t>
+            </a:r>
+          </a:p>
+          <a:p>
+            <a:r>
+              <a:rPr lang="en-GB" dirty="0"/>
+              <a:t>PostgreSQL and MongoDB are becoming more preferred.</a:t>
+            </a:r>
+            <a:endParaRPr lang="en-US" dirty="0"/>
           </a:p>
         </p:txBody>
       </p:sp>

--- a/Capstone_project/Capstone_Project_Md_hasanuzzaman.pptx
+++ b/Capstone_project/Capstone_Project_Md_hasanuzzaman.pptx
@@ -4823,8 +4823,8 @@
         </p:nvSpPr>
         <p:spPr>
           <a:xfrm>
-            <a:off x="1322167" y="1179418"/>
-            <a:ext cx="5739646" cy="2387600"/>
+            <a:off x="1644897" y="2120712"/>
+            <a:ext cx="5739646" cy="1474135"/>
           </a:xfrm>
           <a:noFill/>
         </p:spPr>
@@ -4857,7 +4857,7 @@
         </p:nvSpPr>
         <p:spPr>
           <a:xfrm>
-            <a:off x="1333040" y="3731247"/>
+            <a:off x="1431652" y="3686424"/>
             <a:ext cx="5849957" cy="1006006"/>
           </a:xfrm>
           <a:noFill/>
@@ -4887,7 +4887,7 @@
                   <a:srgbClr val="0072C3"/>
                 </a:solidFill>
               </a:rPr>
-              <a:t>MARCH 2025</a:t>
+              <a:t>DATA SCIENTIST</a:t>
             </a:r>
           </a:p>
         </p:txBody>
@@ -5510,54 +5510,36 @@
           </a:p>
         </p:txBody>
       </p:sp>
-      <p:sp>
-        <p:nvSpPr>
-          <p:cNvPr id="3" name="Content Placeholder 2">
+      <p:pic>
+        <p:nvPicPr>
+          <p:cNvPr id="4" name="Picture 3">
             <a:extLst>
               <a:ext uri="{FF2B5EF4-FFF2-40B4-BE49-F238E27FC236}">
-                <a16:creationId xmlns:a16="http://schemas.microsoft.com/office/drawing/2014/main" id="{84961A98-8DF3-E66E-19C4-7D7642551E90}"/>
+                <a16:creationId xmlns:a16="http://schemas.microsoft.com/office/drawing/2014/main" id="{B4EC961D-49BF-4053-8105-B1C3EC99D5B4}"/>
               </a:ext>
             </a:extLst>
           </p:cNvPr>
-          <p:cNvSpPr>
-            <a:spLocks noGrp="1"/>
-          </p:cNvSpPr>
-          <p:nvPr>
-            <p:ph idx="1"/>
-          </p:nvPr>
-        </p:nvSpPr>
-        <p:spPr>
-          <a:xfrm>
-            <a:off x="838200" y="1690688"/>
-            <a:ext cx="10515600" cy="4351338"/>
-          </a:xfrm>
-        </p:spPr>
-        <p:txBody>
-          <a:bodyPr/>
-          <a:lstStyle/>
-          <a:p>
-            <a:pPr marL="0" indent="0">
-              <a:buNone/>
-            </a:pPr>
-            <a:endParaRPr lang="en-US" dirty="0"/>
-          </a:p>
-          <a:p>
-            <a:pPr marL="0" indent="0">
-              <a:buNone/>
-            </a:pPr>
-            <a:endParaRPr lang="en-US" dirty="0"/>
-          </a:p>
-          <a:p>
-            <a:pPr marL="0" indent="0">
-              <a:buNone/>
-            </a:pPr>
-            <a:r>
-              <a:rPr lang="en-US" dirty="0"/>
-              <a:t>Screenshot of dashboard tab 3 goes here</a:t>
-            </a:r>
-          </a:p>
-        </p:txBody>
-      </p:sp>
+          <p:cNvPicPr>
+            <a:picLocks noChangeAspect="1"/>
+          </p:cNvPicPr>
+          <p:nvPr/>
+        </p:nvPicPr>
+        <p:blipFill>
+          <a:blip r:embed="rId3"/>
+          <a:stretch>
+            <a:fillRect/>
+          </a:stretch>
+        </p:blipFill>
+        <p:spPr>
+          <a:xfrm>
+            <a:off x="1859578" y="1391075"/>
+            <a:ext cx="9052262" cy="4985059"/>
+          </a:xfrm>
+          <a:prstGeom prst="rect">
+            <a:avLst/>
+          </a:prstGeom>
+        </p:spPr>
+      </p:pic>
     </p:spTree>
     <p:custDataLst>
       <p:tags r:id="rId1"/>
@@ -5791,7 +5773,7 @@
         </p:spPr>
         <p:txBody>
           <a:bodyPr>
-            <a:normAutofit/>
+            <a:normAutofit fontScale="92500" lnSpcReduction="10000"/>
           </a:bodyPr>
           <a:lstStyle/>
           <a:p>
@@ -5811,21 +5793,22 @@
           </a:p>
           <a:p>
             <a:r>
-              <a:rPr lang="en-US" dirty="0"/>
-              <a:t>Finding 1</a:t>
-            </a:r>
-          </a:p>
-          <a:p>
-            <a:r>
-              <a:rPr lang="en-US" dirty="0"/>
-              <a:t>Finding 2</a:t>
-            </a:r>
-          </a:p>
-          <a:p>
-            <a:r>
-              <a:rPr lang="en-US" dirty="0"/>
-              <a:t>Finding 3</a:t>
-            </a:r>
+              <a:rPr lang="en-GB" dirty="0"/>
+              <a:t>JavaScript is widely used, and TypeScript is growing in popularity.</a:t>
+            </a:r>
+          </a:p>
+          <a:p>
+            <a:r>
+              <a:rPr lang="en-GB" dirty="0"/>
+              <a:t>Over 90% of developers are young and male.</a:t>
+            </a:r>
+          </a:p>
+          <a:p>
+            <a:r>
+              <a:rPr lang="en-GB" dirty="0"/>
+              <a:t>Most developers are located in developed countries.</a:t>
+            </a:r>
+            <a:endParaRPr lang="en-US" dirty="0"/>
           </a:p>
         </p:txBody>
       </p:sp>
@@ -5853,7 +5836,7 @@
         </p:spPr>
         <p:txBody>
           <a:bodyPr>
-            <a:normAutofit/>
+            <a:normAutofit fontScale="92500" lnSpcReduction="10000"/>
           </a:bodyPr>
           <a:lstStyle/>
           <a:p>
@@ -5873,21 +5856,22 @@
           </a:p>
           <a:p>
             <a:r>
-              <a:rPr lang="en-US" dirty="0"/>
-              <a:t>Implication 1</a:t>
-            </a:r>
-          </a:p>
-          <a:p>
-            <a:r>
-              <a:rPr lang="en-US" dirty="0"/>
-              <a:t>Implication 2</a:t>
-            </a:r>
-          </a:p>
-          <a:p>
-            <a:r>
-              <a:rPr lang="en-US" dirty="0"/>
-              <a:t>Implication 3</a:t>
-            </a:r>
+              <a:rPr lang="en-GB" dirty="0"/>
+              <a:t>Web frameworks for JavaScript and TypeScript are seeing increasing adoption.</a:t>
+            </a:r>
+          </a:p>
+          <a:p>
+            <a:r>
+              <a:rPr lang="en-GB" dirty="0"/>
+              <a:t>Developer demographics are showing a gender and age skew.</a:t>
+            </a:r>
+          </a:p>
+          <a:p>
+            <a:r>
+              <a:rPr lang="en-GB" dirty="0"/>
+              <a:t>There is a geographical concentration of developers in wealthier nations.</a:t>
+            </a:r>
+            <a:endParaRPr lang="en-US" dirty="0"/>
           </a:p>
         </p:txBody>
       </p:sp>
@@ -6158,26 +6142,26 @@
           </a:lstStyle>
           <a:p>
             <a:r>
-              <a:rPr lang="en-US"/>
-              <a:t>Point 1</a:t>
-            </a:r>
-          </a:p>
-          <a:p>
-            <a:r>
-              <a:rPr lang="en-US"/>
-              <a:t>Point 2</a:t>
-            </a:r>
-          </a:p>
-          <a:p>
-            <a:r>
-              <a:rPr lang="en-US"/>
-              <a:t>Point 3</a:t>
-            </a:r>
-          </a:p>
-          <a:p>
-            <a:r>
-              <a:rPr lang="en-US"/>
-              <a:t>Point 4</a:t>
+              <a:rPr lang="en-GB" dirty="0"/>
+              <a:t>Developers have unique characteristics.</a:t>
+            </a:r>
+          </a:p>
+          <a:p>
+            <a:r>
+              <a:rPr lang="en-GB" dirty="0"/>
+              <a:t>Analysing trends in tools and languages provides valuable insights.</a:t>
+            </a:r>
+          </a:p>
+          <a:p>
+            <a:r>
+              <a:rPr lang="en-GB" dirty="0"/>
+              <a:t>There's a need to improve access to the job market in developing countries.</a:t>
+            </a:r>
+          </a:p>
+          <a:p>
+            <a:r>
+              <a:rPr lang="en-GB" dirty="0"/>
+              <a:t>The developer community is predominantly concentrated in developed countries, with a younger, male-dominated demographic.</a:t>
             </a:r>
             <a:endParaRPr lang="en-US" dirty="0"/>
           </a:p>
@@ -6578,8 +6562,8 @@
         </p:nvSpPr>
         <p:spPr>
           <a:xfrm>
-            <a:off x="538248" y="383051"/>
-            <a:ext cx="5929053" cy="1325563"/>
+            <a:off x="838200" y="365125"/>
+            <a:ext cx="10515600" cy="1325563"/>
           </a:xfrm>
         </p:spPr>
         <p:txBody>
@@ -6595,218 +6579,36 @@
           </a:p>
         </p:txBody>
       </p:sp>
-      <p:sp>
-        <p:nvSpPr>
-          <p:cNvPr id="10" name="Content Placeholder 2">
+      <p:pic>
+        <p:nvPicPr>
+          <p:cNvPr id="5" name="Picture 4">
             <a:extLst>
               <a:ext uri="{FF2B5EF4-FFF2-40B4-BE49-F238E27FC236}">
-                <a16:creationId xmlns:a16="http://schemas.microsoft.com/office/drawing/2014/main" id="{83F79416-0AFB-FC80-07E8-3CF2B4E7E798}"/>
+                <a16:creationId xmlns:a16="http://schemas.microsoft.com/office/drawing/2014/main" id="{8872CC49-A647-70AF-F076-0E1890BB372E}"/>
               </a:ext>
             </a:extLst>
           </p:cNvPr>
-          <p:cNvSpPr txBox="1">
-            <a:spLocks/>
-          </p:cNvSpPr>
+          <p:cNvPicPr>
+            <a:picLocks noChangeAspect="1"/>
+          </p:cNvPicPr>
           <p:nvPr/>
-        </p:nvSpPr>
-        <p:spPr>
-          <a:xfrm>
-            <a:off x="914400" y="2191385"/>
-            <a:ext cx="10489276" cy="2862753"/>
+        </p:nvPicPr>
+        <p:blipFill>
+          <a:blip r:embed="rId3"/>
+          <a:srcRect r="2" b="25673"/>
+          <a:stretch/>
+        </p:blipFill>
+        <p:spPr>
+          <a:xfrm>
+            <a:off x="828040" y="1417327"/>
+            <a:ext cx="10744200" cy="4571984"/>
           </a:xfrm>
           <a:prstGeom prst="rect">
             <a:avLst/>
           </a:prstGeom>
-        </p:spPr>
-        <p:txBody>
-          <a:bodyPr vert="horz" lIns="91440" tIns="45720" rIns="91440" bIns="45720" rtlCol="0">
-            <a:normAutofit/>
-          </a:bodyPr>
-          <a:lstStyle>
-            <a:lvl1pPr marL="228600" indent="-228600" algn="l" defTabSz="914400" rtl="0" eaLnBrk="1" latinLnBrk="0" hangingPunct="1">
-              <a:lnSpc>
-                <a:spcPct val="90000"/>
-              </a:lnSpc>
-              <a:spcBef>
-                <a:spcPts val="1000"/>
-              </a:spcBef>
-              <a:buFont typeface="Arial"/>
-              <a:buChar char="•"/>
-              <a:defRPr sz="2800" kern="1200">
-                <a:solidFill>
-                  <a:srgbClr val="262626"/>
-                </a:solidFill>
-                <a:latin typeface="IBM Plex Sans" panose="020B0503050203000203" pitchFamily="34" charset="0"/>
-                <a:ea typeface="+mn-ea"/>
-                <a:cs typeface="+mn-cs"/>
-              </a:defRPr>
-            </a:lvl1pPr>
-            <a:lvl2pPr marL="685800" indent="-228600" algn="l" defTabSz="914400" rtl="0" eaLnBrk="1" latinLnBrk="0" hangingPunct="1">
-              <a:lnSpc>
-                <a:spcPct val="90000"/>
-              </a:lnSpc>
-              <a:spcBef>
-                <a:spcPts val="500"/>
-              </a:spcBef>
-              <a:buFont typeface="Arial"/>
-              <a:buChar char="•"/>
-              <a:defRPr sz="2400" kern="1200">
-                <a:solidFill>
-                  <a:srgbClr val="262626"/>
-                </a:solidFill>
-                <a:latin typeface="IBM Plex Sans" panose="020B0503050203000203" pitchFamily="34" charset="0"/>
-                <a:ea typeface="+mn-ea"/>
-                <a:cs typeface="+mn-cs"/>
-              </a:defRPr>
-            </a:lvl2pPr>
-            <a:lvl3pPr marL="1143000" indent="-228600" algn="l" defTabSz="914400" rtl="0" eaLnBrk="1" latinLnBrk="0" hangingPunct="1">
-              <a:lnSpc>
-                <a:spcPct val="90000"/>
-              </a:lnSpc>
-              <a:spcBef>
-                <a:spcPts val="500"/>
-              </a:spcBef>
-              <a:buFont typeface="Arial"/>
-              <a:buChar char="•"/>
-              <a:defRPr sz="2000" kern="1200">
-                <a:solidFill>
-                  <a:srgbClr val="262626"/>
-                </a:solidFill>
-                <a:latin typeface="IBM Plex Sans" panose="020B0503050203000203" pitchFamily="34" charset="0"/>
-                <a:ea typeface="+mn-ea"/>
-                <a:cs typeface="+mn-cs"/>
-              </a:defRPr>
-            </a:lvl3pPr>
-            <a:lvl4pPr marL="1600200" indent="-228600" algn="l" defTabSz="914400" rtl="0" eaLnBrk="1" latinLnBrk="0" hangingPunct="1">
-              <a:lnSpc>
-                <a:spcPct val="90000"/>
-              </a:lnSpc>
-              <a:spcBef>
-                <a:spcPts val="500"/>
-              </a:spcBef>
-              <a:buFont typeface="Arial"/>
-              <a:buChar char="•"/>
-              <a:defRPr sz="1800" kern="1200">
-                <a:solidFill>
-                  <a:srgbClr val="525252"/>
-                </a:solidFill>
-                <a:latin typeface="IBM Plex Sans" panose="020B0503050203000203" pitchFamily="34" charset="0"/>
-                <a:ea typeface="+mn-ea"/>
-                <a:cs typeface="+mn-cs"/>
-              </a:defRPr>
-            </a:lvl4pPr>
-            <a:lvl5pPr marL="2057400" indent="-228600" algn="l" defTabSz="914400" rtl="0" eaLnBrk="1" latinLnBrk="0" hangingPunct="1">
-              <a:lnSpc>
-                <a:spcPct val="90000"/>
-              </a:lnSpc>
-              <a:spcBef>
-                <a:spcPts val="500"/>
-              </a:spcBef>
-              <a:buFont typeface="Arial"/>
-              <a:buChar char="•"/>
-              <a:defRPr sz="1800" kern="1200">
-                <a:solidFill>
-                  <a:srgbClr val="525252"/>
-                </a:solidFill>
-                <a:latin typeface="IBM Plex Sans" panose="020B0503050203000203" pitchFamily="34" charset="0"/>
-                <a:ea typeface="+mn-ea"/>
-                <a:cs typeface="+mn-cs"/>
-              </a:defRPr>
-            </a:lvl5pPr>
-            <a:lvl6pPr marL="2514600" indent="-228600" algn="l" defTabSz="914400" rtl="0" eaLnBrk="1" latinLnBrk="0" hangingPunct="1">
-              <a:lnSpc>
-                <a:spcPct val="90000"/>
-              </a:lnSpc>
-              <a:spcBef>
-                <a:spcPts val="500"/>
-              </a:spcBef>
-              <a:buFont typeface="Arial"/>
-              <a:buChar char="•"/>
-              <a:defRPr sz="1800" kern="1200">
-                <a:solidFill>
-                  <a:schemeClr val="tx1"/>
-                </a:solidFill>
-                <a:latin typeface="+mn-lt"/>
-                <a:ea typeface="+mn-ea"/>
-                <a:cs typeface="+mn-cs"/>
-              </a:defRPr>
-            </a:lvl6pPr>
-            <a:lvl7pPr marL="2971800" indent="-228600" algn="l" defTabSz="914400" rtl="0" eaLnBrk="1" latinLnBrk="0" hangingPunct="1">
-              <a:lnSpc>
-                <a:spcPct val="90000"/>
-              </a:lnSpc>
-              <a:spcBef>
-                <a:spcPts val="500"/>
-              </a:spcBef>
-              <a:buFont typeface="Arial"/>
-              <a:buChar char="•"/>
-              <a:defRPr sz="1800" kern="1200">
-                <a:solidFill>
-                  <a:schemeClr val="tx1"/>
-                </a:solidFill>
-                <a:latin typeface="+mn-lt"/>
-                <a:ea typeface="+mn-ea"/>
-                <a:cs typeface="+mn-cs"/>
-              </a:defRPr>
-            </a:lvl7pPr>
-            <a:lvl8pPr marL="3429000" indent="-228600" algn="l" defTabSz="914400" rtl="0" eaLnBrk="1" latinLnBrk="0" hangingPunct="1">
-              <a:lnSpc>
-                <a:spcPct val="90000"/>
-              </a:lnSpc>
-              <a:spcBef>
-                <a:spcPts val="500"/>
-              </a:spcBef>
-              <a:buFont typeface="Arial"/>
-              <a:buChar char="•"/>
-              <a:defRPr sz="1800" kern="1200">
-                <a:solidFill>
-                  <a:schemeClr val="tx1"/>
-                </a:solidFill>
-                <a:latin typeface="+mn-lt"/>
-                <a:ea typeface="+mn-ea"/>
-                <a:cs typeface="+mn-cs"/>
-              </a:defRPr>
-            </a:lvl8pPr>
-            <a:lvl9pPr marL="3886200" indent="-228600" algn="l" defTabSz="914400" rtl="0" eaLnBrk="1" latinLnBrk="0" hangingPunct="1">
-              <a:lnSpc>
-                <a:spcPct val="90000"/>
-              </a:lnSpc>
-              <a:spcBef>
-                <a:spcPts val="500"/>
-              </a:spcBef>
-              <a:buFont typeface="Arial"/>
-              <a:buChar char="•"/>
-              <a:defRPr sz="1800" kern="1200">
-                <a:solidFill>
-                  <a:schemeClr val="tx1"/>
-                </a:solidFill>
-                <a:latin typeface="+mn-lt"/>
-                <a:ea typeface="+mn-ea"/>
-                <a:cs typeface="+mn-cs"/>
-              </a:defRPr>
-            </a:lvl9pPr>
-          </a:lstStyle>
-          <a:p>
-            <a:pPr marL="0" indent="0">
-              <a:buFont typeface="Arial"/>
-              <a:buNone/>
-            </a:pPr>
-            <a:r>
-              <a:rPr lang="en-US" sz="2200"/>
-              <a:t>In Module 1 you have collected the job posting data using Job API in a file named “</a:t>
-            </a:r>
-            <a:r>
-              <a:rPr lang="en-IN" sz="2400"/>
-              <a:t>job-postings.xlsx</a:t>
-            </a:r>
-            <a:r>
-              <a:rPr lang="en-US" sz="2200"/>
-              <a:t>”. Present that data using a bar chart here. Order the bar chart in the descending order of the number of job postings.</a:t>
-            </a:r>
-            <a:endParaRPr lang="en-US" sz="2200" dirty="0"/>
-          </a:p>
-        </p:txBody>
-      </p:sp>
+          <a:noFill/>
+        </p:spPr>
+      </p:pic>
     </p:spTree>
     <p:custDataLst>
       <p:tags r:id="rId1"/>
@@ -6881,218 +6683,36 @@
           </a:p>
         </p:txBody>
       </p:sp>
-      <p:sp>
-        <p:nvSpPr>
-          <p:cNvPr id="7" name="Content Placeholder 2">
+      <p:pic>
+        <p:nvPicPr>
+          <p:cNvPr id="2" name="Picture 1">
             <a:extLst>
               <a:ext uri="{FF2B5EF4-FFF2-40B4-BE49-F238E27FC236}">
-                <a16:creationId xmlns:a16="http://schemas.microsoft.com/office/drawing/2014/main" id="{95B1AABA-34AF-B1F5-3C7F-11AEB9E03637}"/>
+                <a16:creationId xmlns:a16="http://schemas.microsoft.com/office/drawing/2014/main" id="{5C8CA495-EBF5-98EA-289E-6029C7D7A720}"/>
               </a:ext>
             </a:extLst>
           </p:cNvPr>
-          <p:cNvSpPr txBox="1">
-            <a:spLocks/>
-          </p:cNvSpPr>
+          <p:cNvPicPr>
+            <a:picLocks noChangeAspect="1"/>
+          </p:cNvPicPr>
           <p:nvPr/>
-        </p:nvSpPr>
-        <p:spPr>
-          <a:xfrm>
-            <a:off x="878305" y="2191385"/>
-            <a:ext cx="10525371" cy="2862753"/>
+        </p:nvPicPr>
+        <p:blipFill>
+          <a:blip r:embed="rId3"/>
+          <a:stretch>
+            <a:fillRect/>
+          </a:stretch>
+        </p:blipFill>
+        <p:spPr>
+          <a:xfrm>
+            <a:off x="2468880" y="1420614"/>
+            <a:ext cx="7599680" cy="5395280"/>
           </a:xfrm>
           <a:prstGeom prst="rect">
             <a:avLst/>
           </a:prstGeom>
         </p:spPr>
-        <p:txBody>
-          <a:bodyPr vert="horz" lIns="91440" tIns="45720" rIns="91440" bIns="45720" rtlCol="0">
-            <a:normAutofit/>
-          </a:bodyPr>
-          <a:lstStyle>
-            <a:lvl1pPr marL="228600" indent="-228600" algn="l" defTabSz="914400" rtl="0" eaLnBrk="1" latinLnBrk="0" hangingPunct="1">
-              <a:lnSpc>
-                <a:spcPct val="90000"/>
-              </a:lnSpc>
-              <a:spcBef>
-                <a:spcPts val="1000"/>
-              </a:spcBef>
-              <a:buFont typeface="Arial"/>
-              <a:buChar char="•"/>
-              <a:defRPr sz="2800" kern="1200">
-                <a:solidFill>
-                  <a:srgbClr val="262626"/>
-                </a:solidFill>
-                <a:latin typeface="IBM Plex Sans" panose="020B0503050203000203" pitchFamily="34" charset="0"/>
-                <a:ea typeface="+mn-ea"/>
-                <a:cs typeface="+mn-cs"/>
-              </a:defRPr>
-            </a:lvl1pPr>
-            <a:lvl2pPr marL="685800" indent="-228600" algn="l" defTabSz="914400" rtl="0" eaLnBrk="1" latinLnBrk="0" hangingPunct="1">
-              <a:lnSpc>
-                <a:spcPct val="90000"/>
-              </a:lnSpc>
-              <a:spcBef>
-                <a:spcPts val="500"/>
-              </a:spcBef>
-              <a:buFont typeface="Arial"/>
-              <a:buChar char="•"/>
-              <a:defRPr sz="2400" kern="1200">
-                <a:solidFill>
-                  <a:srgbClr val="262626"/>
-                </a:solidFill>
-                <a:latin typeface="IBM Plex Sans" panose="020B0503050203000203" pitchFamily="34" charset="0"/>
-                <a:ea typeface="+mn-ea"/>
-                <a:cs typeface="+mn-cs"/>
-              </a:defRPr>
-            </a:lvl2pPr>
-            <a:lvl3pPr marL="1143000" indent="-228600" algn="l" defTabSz="914400" rtl="0" eaLnBrk="1" latinLnBrk="0" hangingPunct="1">
-              <a:lnSpc>
-                <a:spcPct val="90000"/>
-              </a:lnSpc>
-              <a:spcBef>
-                <a:spcPts val="500"/>
-              </a:spcBef>
-              <a:buFont typeface="Arial"/>
-              <a:buChar char="•"/>
-              <a:defRPr sz="2000" kern="1200">
-                <a:solidFill>
-                  <a:srgbClr val="262626"/>
-                </a:solidFill>
-                <a:latin typeface="IBM Plex Sans" panose="020B0503050203000203" pitchFamily="34" charset="0"/>
-                <a:ea typeface="+mn-ea"/>
-                <a:cs typeface="+mn-cs"/>
-              </a:defRPr>
-            </a:lvl3pPr>
-            <a:lvl4pPr marL="1600200" indent="-228600" algn="l" defTabSz="914400" rtl="0" eaLnBrk="1" latinLnBrk="0" hangingPunct="1">
-              <a:lnSpc>
-                <a:spcPct val="90000"/>
-              </a:lnSpc>
-              <a:spcBef>
-                <a:spcPts val="500"/>
-              </a:spcBef>
-              <a:buFont typeface="Arial"/>
-              <a:buChar char="•"/>
-              <a:defRPr sz="1800" kern="1200">
-                <a:solidFill>
-                  <a:srgbClr val="525252"/>
-                </a:solidFill>
-                <a:latin typeface="IBM Plex Sans" panose="020B0503050203000203" pitchFamily="34" charset="0"/>
-                <a:ea typeface="+mn-ea"/>
-                <a:cs typeface="+mn-cs"/>
-              </a:defRPr>
-            </a:lvl4pPr>
-            <a:lvl5pPr marL="2057400" indent="-228600" algn="l" defTabSz="914400" rtl="0" eaLnBrk="1" latinLnBrk="0" hangingPunct="1">
-              <a:lnSpc>
-                <a:spcPct val="90000"/>
-              </a:lnSpc>
-              <a:spcBef>
-                <a:spcPts val="500"/>
-              </a:spcBef>
-              <a:buFont typeface="Arial"/>
-              <a:buChar char="•"/>
-              <a:defRPr sz="1800" kern="1200">
-                <a:solidFill>
-                  <a:srgbClr val="525252"/>
-                </a:solidFill>
-                <a:latin typeface="IBM Plex Sans" panose="020B0503050203000203" pitchFamily="34" charset="0"/>
-                <a:ea typeface="+mn-ea"/>
-                <a:cs typeface="+mn-cs"/>
-              </a:defRPr>
-            </a:lvl5pPr>
-            <a:lvl6pPr marL="2514600" indent="-228600" algn="l" defTabSz="914400" rtl="0" eaLnBrk="1" latinLnBrk="0" hangingPunct="1">
-              <a:lnSpc>
-                <a:spcPct val="90000"/>
-              </a:lnSpc>
-              <a:spcBef>
-                <a:spcPts val="500"/>
-              </a:spcBef>
-              <a:buFont typeface="Arial"/>
-              <a:buChar char="•"/>
-              <a:defRPr sz="1800" kern="1200">
-                <a:solidFill>
-                  <a:schemeClr val="tx1"/>
-                </a:solidFill>
-                <a:latin typeface="+mn-lt"/>
-                <a:ea typeface="+mn-ea"/>
-                <a:cs typeface="+mn-cs"/>
-              </a:defRPr>
-            </a:lvl6pPr>
-            <a:lvl7pPr marL="2971800" indent="-228600" algn="l" defTabSz="914400" rtl="0" eaLnBrk="1" latinLnBrk="0" hangingPunct="1">
-              <a:lnSpc>
-                <a:spcPct val="90000"/>
-              </a:lnSpc>
-              <a:spcBef>
-                <a:spcPts val="500"/>
-              </a:spcBef>
-              <a:buFont typeface="Arial"/>
-              <a:buChar char="•"/>
-              <a:defRPr sz="1800" kern="1200">
-                <a:solidFill>
-                  <a:schemeClr val="tx1"/>
-                </a:solidFill>
-                <a:latin typeface="+mn-lt"/>
-                <a:ea typeface="+mn-ea"/>
-                <a:cs typeface="+mn-cs"/>
-              </a:defRPr>
-            </a:lvl7pPr>
-            <a:lvl8pPr marL="3429000" indent="-228600" algn="l" defTabSz="914400" rtl="0" eaLnBrk="1" latinLnBrk="0" hangingPunct="1">
-              <a:lnSpc>
-                <a:spcPct val="90000"/>
-              </a:lnSpc>
-              <a:spcBef>
-                <a:spcPts val="500"/>
-              </a:spcBef>
-              <a:buFont typeface="Arial"/>
-              <a:buChar char="•"/>
-              <a:defRPr sz="1800" kern="1200">
-                <a:solidFill>
-                  <a:schemeClr val="tx1"/>
-                </a:solidFill>
-                <a:latin typeface="+mn-lt"/>
-                <a:ea typeface="+mn-ea"/>
-                <a:cs typeface="+mn-cs"/>
-              </a:defRPr>
-            </a:lvl8pPr>
-            <a:lvl9pPr marL="3886200" indent="-228600" algn="l" defTabSz="914400" rtl="0" eaLnBrk="1" latinLnBrk="0" hangingPunct="1">
-              <a:lnSpc>
-                <a:spcPct val="90000"/>
-              </a:lnSpc>
-              <a:spcBef>
-                <a:spcPts val="500"/>
-              </a:spcBef>
-              <a:buFont typeface="Arial"/>
-              <a:buChar char="•"/>
-              <a:defRPr sz="1800" kern="1200">
-                <a:solidFill>
-                  <a:schemeClr val="tx1"/>
-                </a:solidFill>
-                <a:latin typeface="+mn-lt"/>
-                <a:ea typeface="+mn-ea"/>
-                <a:cs typeface="+mn-cs"/>
-              </a:defRPr>
-            </a:lvl9pPr>
-          </a:lstStyle>
-          <a:p>
-            <a:pPr marL="0" indent="0">
-              <a:buFont typeface="Arial"/>
-              <a:buNone/>
-            </a:pPr>
-            <a:r>
-              <a:rPr lang="en-US" sz="2200"/>
-              <a:t>In Module 1 you have collected the job postings data using web scraping in a file named “</a:t>
-            </a:r>
-            <a:r>
-              <a:rPr lang="en-IN" sz="2400"/>
-              <a:t>popular-languages.csv</a:t>
-            </a:r>
-            <a:r>
-              <a:rPr lang="en-US" sz="2200"/>
-              <a:t>”. Present that data using a bar chart here. Order the bar chart in the descending order of salary.</a:t>
-            </a:r>
-            <a:endParaRPr lang="en-US" sz="2200" dirty="0"/>
-          </a:p>
-        </p:txBody>
-      </p:sp>
+      </p:pic>
     </p:spTree>
     <p:custDataLst>
       <p:tags r:id="rId1"/>
